--- a/analysis/submitted_analyses/attentional_manipulations_fixationprocess.pptx
+++ b/analysis/submitted_analyses/attentional_manipulations_fixationprocess.pptx
@@ -243,7 +243,7 @@
           <a:p>
             <a:fld id="{CFC60B5F-2253-DF41-8690-61B53F1555CE}" type="datetimeFigureOut">
               <a:rPr lang="en-US" smtClean="0"/>
-              <a:t>6/14/24</a:t>
+              <a:t>7/2/24</a:t>
             </a:fld>
             <a:endParaRPr lang="en-US"/>
           </a:p>
@@ -413,7 +413,7 @@
           <a:p>
             <a:fld id="{CFC60B5F-2253-DF41-8690-61B53F1555CE}" type="datetimeFigureOut">
               <a:rPr lang="en-US" smtClean="0"/>
-              <a:t>6/14/24</a:t>
+              <a:t>7/2/24</a:t>
             </a:fld>
             <a:endParaRPr lang="en-US"/>
           </a:p>
@@ -593,7 +593,7 @@
           <a:p>
             <a:fld id="{CFC60B5F-2253-DF41-8690-61B53F1555CE}" type="datetimeFigureOut">
               <a:rPr lang="en-US" smtClean="0"/>
-              <a:t>6/14/24</a:t>
+              <a:t>7/2/24</a:t>
             </a:fld>
             <a:endParaRPr lang="en-US"/>
           </a:p>
@@ -763,7 +763,7 @@
           <a:p>
             <a:fld id="{CFC60B5F-2253-DF41-8690-61B53F1555CE}" type="datetimeFigureOut">
               <a:rPr lang="en-US" smtClean="0"/>
-              <a:t>6/14/24</a:t>
+              <a:t>7/2/24</a:t>
             </a:fld>
             <a:endParaRPr lang="en-US"/>
           </a:p>
@@ -1007,7 +1007,7 @@
           <a:p>
             <a:fld id="{CFC60B5F-2253-DF41-8690-61B53F1555CE}" type="datetimeFigureOut">
               <a:rPr lang="en-US" smtClean="0"/>
-              <a:t>6/14/24</a:t>
+              <a:t>7/2/24</a:t>
             </a:fld>
             <a:endParaRPr lang="en-US"/>
           </a:p>
@@ -1239,7 +1239,7 @@
           <a:p>
             <a:fld id="{CFC60B5F-2253-DF41-8690-61B53F1555CE}" type="datetimeFigureOut">
               <a:rPr lang="en-US" smtClean="0"/>
-              <a:t>6/14/24</a:t>
+              <a:t>7/2/24</a:t>
             </a:fld>
             <a:endParaRPr lang="en-US"/>
           </a:p>
@@ -1606,7 +1606,7 @@
           <a:p>
             <a:fld id="{CFC60B5F-2253-DF41-8690-61B53F1555CE}" type="datetimeFigureOut">
               <a:rPr lang="en-US" smtClean="0"/>
-              <a:t>6/14/24</a:t>
+              <a:t>7/2/24</a:t>
             </a:fld>
             <a:endParaRPr lang="en-US"/>
           </a:p>
@@ -1724,7 +1724,7 @@
           <a:p>
             <a:fld id="{CFC60B5F-2253-DF41-8690-61B53F1555CE}" type="datetimeFigureOut">
               <a:rPr lang="en-US" smtClean="0"/>
-              <a:t>6/14/24</a:t>
+              <a:t>7/2/24</a:t>
             </a:fld>
             <a:endParaRPr lang="en-US"/>
           </a:p>
@@ -1819,7 +1819,7 @@
           <a:p>
             <a:fld id="{CFC60B5F-2253-DF41-8690-61B53F1555CE}" type="datetimeFigureOut">
               <a:rPr lang="en-US" smtClean="0"/>
-              <a:t>6/14/24</a:t>
+              <a:t>7/2/24</a:t>
             </a:fld>
             <a:endParaRPr lang="en-US"/>
           </a:p>
@@ -2096,7 +2096,7 @@
           <a:p>
             <a:fld id="{CFC60B5F-2253-DF41-8690-61B53F1555CE}" type="datetimeFigureOut">
               <a:rPr lang="en-US" smtClean="0"/>
-              <a:t>6/14/24</a:t>
+              <a:t>7/2/24</a:t>
             </a:fld>
             <a:endParaRPr lang="en-US"/>
           </a:p>
@@ -2353,7 +2353,7 @@
           <a:p>
             <a:fld id="{CFC60B5F-2253-DF41-8690-61B53F1555CE}" type="datetimeFigureOut">
               <a:rPr lang="en-US" smtClean="0"/>
-              <a:t>6/14/24</a:t>
+              <a:t>7/2/24</a:t>
             </a:fld>
             <a:endParaRPr lang="en-US"/>
           </a:p>
@@ -2566,7 +2566,7 @@
           <a:p>
             <a:fld id="{CFC60B5F-2253-DF41-8690-61B53F1555CE}" type="datetimeFigureOut">
               <a:rPr lang="en-US" smtClean="0"/>
-              <a:t>6/14/24</a:t>
+              <a:t>7/2/24</a:t>
             </a:fld>
             <a:endParaRPr lang="en-US"/>
           </a:p>
@@ -3003,36 +3003,6 @@
       </p:pic>
       <p:pic>
         <p:nvPicPr>
-          <p:cNvPr id="6" name="Picture 5">
-            <a:extLst>
-              <a:ext uri="{FF2B5EF4-FFF2-40B4-BE49-F238E27FC236}">
-                <a16:creationId xmlns:a16="http://schemas.microsoft.com/office/drawing/2014/main" id="{CDAECCED-DF8E-0223-2871-135C4B5AFFF3}"/>
-              </a:ext>
-            </a:extLst>
-          </p:cNvPr>
-          <p:cNvPicPr>
-            <a:picLocks noChangeAspect="1"/>
-          </p:cNvPicPr>
-          <p:nvPr/>
-        </p:nvPicPr>
-        <p:blipFill>
-          <a:blip r:embed="rId3"/>
-          <a:stretch>
-            <a:fillRect/>
-          </a:stretch>
-        </p:blipFill>
-        <p:spPr>
-          <a:xfrm>
-            <a:off x="0" y="3108960"/>
-            <a:ext cx="7772400" cy="3108960"/>
-          </a:xfrm>
-          <a:prstGeom prst="rect">
-            <a:avLst/>
-          </a:prstGeom>
-        </p:spPr>
-      </p:pic>
-      <p:pic>
-        <p:nvPicPr>
           <p:cNvPr id="8" name="Picture 7">
             <a:extLst>
               <a:ext uri="{FF2B5EF4-FFF2-40B4-BE49-F238E27FC236}">
@@ -3046,7 +3016,7 @@
           <p:nvPr/>
         </p:nvPicPr>
         <p:blipFill>
-          <a:blip r:embed="rId4"/>
+          <a:blip r:embed="rId3"/>
           <a:stretch>
             <a:fillRect/>
           </a:stretch>
@@ -3076,6 +3046,36 @@
           <p:nvPr/>
         </p:nvPicPr>
         <p:blipFill>
+          <a:blip r:embed="rId4"/>
+          <a:stretch>
+            <a:fillRect/>
+          </a:stretch>
+        </p:blipFill>
+        <p:spPr>
+          <a:xfrm>
+            <a:off x="0" y="9327515"/>
+            <a:ext cx="7772400" cy="3108960"/>
+          </a:xfrm>
+          <a:prstGeom prst="rect">
+            <a:avLst/>
+          </a:prstGeom>
+        </p:spPr>
+      </p:pic>
+      <p:pic>
+        <p:nvPicPr>
+          <p:cNvPr id="3" name="Picture 2">
+            <a:extLst>
+              <a:ext uri="{FF2B5EF4-FFF2-40B4-BE49-F238E27FC236}">
+                <a16:creationId xmlns:a16="http://schemas.microsoft.com/office/drawing/2014/main" id="{07FE9E5E-A3FE-0269-2DB5-DFD191BC9270}"/>
+              </a:ext>
+            </a:extLst>
+          </p:cNvPr>
+          <p:cNvPicPr>
+            <a:picLocks noChangeAspect="1"/>
+          </p:cNvPicPr>
+          <p:nvPr/>
+        </p:nvPicPr>
+        <p:blipFill>
           <a:blip r:embed="rId5"/>
           <a:stretch>
             <a:fillRect/>
@@ -3083,7 +3083,7 @@
         </p:blipFill>
         <p:spPr>
           <a:xfrm>
-            <a:off x="0" y="9327515"/>
+            <a:off x="0" y="3108325"/>
             <a:ext cx="7772400" cy="3108960"/>
           </a:xfrm>
           <a:prstGeom prst="rect">
